--- a/hearts-and-minds/journey-decks/hm-journey-joe-v1.pptx
+++ b/hearts-and-minds/journey-decks/hm-journey-joe-v1.pptx
@@ -1940,7 +1940,7 @@
       </p:sp>
       <p:pic>
         <p:nvPicPr>
-          <p:cNvPr id="10" name="Image 1" descr="/sessions/quirky-zen-galileo/mnt/outputs/hmdecks/img/joe-portrait.jpg">    </p:cNvPr>
+          <p:cNvPr id="10" name="Image 1" descr="/sessions/quirky-zen-galileo/mnt/outputs/hmdecks5/img/joe-portrait.jpg">    </p:cNvPr>
           <p:cNvPicPr>
             <a:picLocks noChangeAspect="1"/>
           </p:cNvPicPr>
@@ -4382,7 +4382,7 @@
       </p:sp>
       <p:pic>
         <p:nvPicPr>
-          <p:cNvPr id="13" name="Image 1" descr="/sessions/quirky-zen-galileo/mnt/outputs/hmdecks/img/joe-stage1.jpg">    </p:cNvPr>
+          <p:cNvPr id="13" name="Image 1" descr="/sessions/quirky-zen-galileo/mnt/outputs/hmdecks5/img/joe-stage1.jpg">    </p:cNvPr>
           <p:cNvPicPr>
             <a:picLocks noChangeAspect="1"/>
           </p:cNvPicPr>
@@ -5329,7 +5329,7 @@
       </p:sp>
       <p:pic>
         <p:nvPicPr>
-          <p:cNvPr id="13" name="Image 1" descr="/sessions/quirky-zen-galileo/mnt/outputs/hmdecks/img/joe-stage2.jpg">    </p:cNvPr>
+          <p:cNvPr id="13" name="Image 1" descr="/sessions/quirky-zen-galileo/mnt/outputs/hmdecks5/img/joe-stage2.jpg">    </p:cNvPr>
           <p:cNvPicPr>
             <a:picLocks noChangeAspect="1"/>
           </p:cNvPicPr>
@@ -6290,7 +6290,7 @@
       </p:sp>
       <p:pic>
         <p:nvPicPr>
-          <p:cNvPr id="13" name="Image 1" descr="/sessions/quirky-zen-galileo/mnt/outputs/hmdecks/img/joe-stage3.jpg">    </p:cNvPr>
+          <p:cNvPr id="13" name="Image 1" descr="/sessions/quirky-zen-galileo/mnt/outputs/hmdecks5/img/joe-stage3.jpg">    </p:cNvPr>
           <p:cNvPicPr>
             <a:picLocks noChangeAspect="1"/>
           </p:cNvPicPr>
@@ -7237,7 +7237,7 @@
       </p:sp>
       <p:pic>
         <p:nvPicPr>
-          <p:cNvPr id="13" name="Image 1" descr="/sessions/quirky-zen-galileo/mnt/outputs/hmdecks/img/joe-stage4.jpg">    </p:cNvPr>
+          <p:cNvPr id="13" name="Image 1" descr="/sessions/quirky-zen-galileo/mnt/outputs/hmdecks5/img/joe-stage4.jpg">    </p:cNvPr>
           <p:cNvPicPr>
             <a:picLocks noChangeAspect="1"/>
           </p:cNvPicPr>
@@ -8184,7 +8184,7 @@
       </p:sp>
       <p:pic>
         <p:nvPicPr>
-          <p:cNvPr id="13" name="Image 1" descr="/sessions/quirky-zen-galileo/mnt/outputs/hmdecks/img/joe-stage5.jpg">    </p:cNvPr>
+          <p:cNvPr id="13" name="Image 1" descr="/sessions/quirky-zen-galileo/mnt/outputs/hmdecks5/img/joe-stage5.jpg">    </p:cNvPr>
           <p:cNvPicPr>
             <a:picLocks noChangeAspect="1"/>
           </p:cNvPicPr>
@@ -9131,7 +9131,7 @@
       </p:sp>
       <p:pic>
         <p:nvPicPr>
-          <p:cNvPr id="13" name="Image 1" descr="/sessions/quirky-zen-galileo/mnt/outputs/hmdecks/img/joe-stage6.jpg">    </p:cNvPr>
+          <p:cNvPr id="13" name="Image 1" descr="/sessions/quirky-zen-galileo/mnt/outputs/hmdecks5/img/joe-stage6.jpg">    </p:cNvPr>
           <p:cNvPicPr>
             <a:picLocks noChangeAspect="1"/>
           </p:cNvPicPr>
